--- a/submission/Round1_Case4_LabelTwin.pptx
+++ b/submission/Round1_Case4_LabelTwin.pptx
@@ -6835,7 +6835,7 @@
         <p:spPr>
           <a:xfrm>
             <a:off x="274320" y="2523744"/>
-            <a:ext cx="3657600" cy="256032"/>
+            <a:ext cx="8229600" cy="256032"/>
           </a:xfrm>
           <a:prstGeom prst="rect">
             <a:avLst/>
